--- a/Introduccion a la Ingenieria/Clases/Presentacion del Curso - Introduccion a la Ingenieria - SB141B.pptx
+++ b/Introduccion a la Ingenieria/Clases/Presentacion del Curso - Introduccion a la Ingenieria - SB141B.pptx
@@ -8123,7 +8123,7 @@
               </a:spcAft>
             </a:pPr>
             <a:r>
-              <a:rPr sz="1600" b="0" i="0">
+              <a:rPr sz="2000" b="0" i="0">
                 <a:solidFill>
                   <a:srgbClr val="333333"/>
                 </a:solidFill>
@@ -8132,7 +8132,7 @@
               <a:t>–   </a:t>
             </a:r>
             <a:r>
-              <a:rPr sz="1600" b="1" i="0">
+              <a:rPr sz="2000" b="1" i="0">
                 <a:solidFill>
                   <a:srgbClr val="333333"/>
                 </a:solidFill>
@@ -8141,7 +8141,7 @@
               <a:t>Objeto de estudio:</a:t>
             </a:r>
             <a:r>
-              <a:rPr sz="1600" b="0" i="0">
+              <a:rPr sz="2000" b="0" i="0">
                 <a:solidFill>
                   <a:srgbClr val="333333"/>
                 </a:solidFill>
@@ -8157,7 +8157,7 @@
               </a:spcAft>
             </a:pPr>
             <a:r>
-              <a:rPr sz="1600" b="0" i="0">
+              <a:rPr sz="2000" b="0" i="0">
                 <a:solidFill>
                   <a:srgbClr val="333333"/>
                 </a:solidFill>
@@ -8166,7 +8166,7 @@
               <a:t>–   Es el curso de </a:t>
             </a:r>
             <a:r>
-              <a:rPr sz="1600" b="1" i="0">
+              <a:rPr sz="2000" b="1" i="0">
                 <a:solidFill>
                   <a:srgbClr val="333333"/>
                 </a:solidFill>
@@ -8175,7 +8175,7 @@
               <a:t>primer semestre</a:t>
             </a:r>
             <a:r>
-              <a:rPr sz="1600" b="0" i="0">
+              <a:rPr sz="2000" b="0" i="0">
                 <a:solidFill>
                   <a:srgbClr val="333333"/>
                 </a:solidFill>
@@ -8184,7 +8184,7 @@
               <a:t> que responde una pregunta concreta: </a:t>
             </a:r>
             <a:r>
-              <a:rPr sz="1600" b="1" i="0">
+              <a:rPr sz="2000" b="1" i="0">
                 <a:solidFill>
                   <a:srgbClr val="333333"/>
                 </a:solidFill>
@@ -8200,7 +8200,7 @@
               </a:spcAft>
             </a:pPr>
             <a:r>
-              <a:rPr sz="1600" b="0" i="0">
+              <a:rPr sz="2000" b="0" i="0">
                 <a:solidFill>
                   <a:srgbClr val="333333"/>
                 </a:solidFill>
@@ -8209,7 +8209,7 @@
               <a:t>–   No se programa todavía. Se aprende a </a:t>
             </a:r>
             <a:r>
-              <a:rPr sz="1600" b="1" i="0">
+              <a:rPr sz="2000" b="1" i="0">
                 <a:solidFill>
                   <a:srgbClr val="333333"/>
                 </a:solidFill>
@@ -8218,7 +8218,7 @@
               <a:t>mirar un problema del entorno</a:t>
             </a:r>
             <a:r>
-              <a:rPr sz="1600" b="0" i="0">
+              <a:rPr sz="2000" b="0" i="0">
                 <a:solidFill>
                   <a:srgbClr val="333333"/>
                 </a:solidFill>
@@ -8234,7 +8234,7 @@
               </a:spcAft>
             </a:pPr>
             <a:r>
-              <a:rPr sz="1600" b="0" i="0">
+              <a:rPr sz="2000" b="0" i="0">
                 <a:solidFill>
                   <a:srgbClr val="333333"/>
                 </a:solidFill>
@@ -8243,7 +8243,7 @@
               <a:t>–   </a:t>
             </a:r>
             <a:r>
-              <a:rPr sz="1600" b="1" i="0">
+              <a:rPr sz="2000" b="1" i="0">
                 <a:solidFill>
                   <a:srgbClr val="333333"/>
                 </a:solidFill>
@@ -8252,7 +8252,7 @@
               <a:t>Objetivo:</a:t>
             </a:r>
             <a:r>
-              <a:rPr sz="1600" b="0" i="0">
+              <a:rPr sz="2000" b="0" i="0">
                 <a:solidFill>
                   <a:srgbClr val="333333"/>
                 </a:solidFill>
@@ -8268,7 +8268,7 @@
               </a:spcAft>
             </a:pPr>
             <a:r>
-              <a:rPr sz="1600" b="0" i="0">
+              <a:rPr sz="2000" b="0" i="0">
                 <a:solidFill>
                   <a:srgbClr val="333333"/>
                 </a:solidFill>
@@ -8277,7 +8277,7 @@
               <a:t>–   Créditos: </a:t>
             </a:r>
             <a:r>
-              <a:rPr sz="1600" b="1" i="0">
+              <a:rPr sz="2000" b="1" i="0">
                 <a:solidFill>
                   <a:srgbClr val="333333"/>
                 </a:solidFill>
@@ -8286,7 +8286,7 @@
               <a:t>2</a:t>
             </a:r>
             <a:r>
-              <a:rPr sz="1600" b="0" i="0">
+              <a:rPr sz="2000" b="0" i="0">
                 <a:solidFill>
                   <a:srgbClr val="333333"/>
                 </a:solidFill>
@@ -8295,7 +8295,7 @@
               <a:t> · Tipo: </a:t>
             </a:r>
             <a:r>
-              <a:rPr sz="1600" b="1" i="0">
+              <a:rPr sz="2000" b="1" i="0">
                 <a:solidFill>
                   <a:srgbClr val="333333"/>
                 </a:solidFill>
@@ -8304,7 +8304,7 @@
               <a:t>Teórica / Práctica</a:t>
             </a:r>
             <a:r>
-              <a:rPr sz="1600" b="0" i="0">
+              <a:rPr sz="2000" b="0" i="0">
                 <a:solidFill>
                   <a:srgbClr val="333333"/>
                 </a:solidFill>
@@ -8313,7 +8313,7 @@
               <a:t> · Habilitable: </a:t>
             </a:r>
             <a:r>
-              <a:rPr sz="1600" b="1" i="0">
+              <a:rPr sz="2000" b="1" i="0">
                 <a:solidFill>
                   <a:srgbClr val="333333"/>
                 </a:solidFill>
@@ -8533,7 +8533,7 @@
               </a:spcAft>
             </a:pPr>
             <a:r>
-              <a:rPr sz="1600" b="0" i="0">
+              <a:rPr sz="2000" b="0" i="0">
                 <a:solidFill>
                   <a:srgbClr val="333333"/>
                 </a:solidFill>
@@ -8542,7 +8542,7 @@
               <a:t>–   </a:t>
             </a:r>
             <a:r>
-              <a:rPr sz="1600" b="1" i="0">
+              <a:rPr sz="2000" b="1" i="0">
                 <a:solidFill>
                   <a:srgbClr val="333333"/>
                 </a:solidFill>
@@ -8551,7 +8551,7 @@
               <a:t>RAP del programa:</a:t>
             </a:r>
             <a:r>
-              <a:rPr sz="1600" b="0" i="0">
+              <a:rPr sz="2000" b="0" i="0">
                 <a:solidFill>
                   <a:srgbClr val="333333"/>
                 </a:solidFill>
@@ -8567,7 +8567,7 @@
               </a:spcAft>
             </a:pPr>
             <a:r>
-              <a:rPr sz="1600" b="0" i="0">
+              <a:rPr sz="2000" b="0" i="0">
                 <a:solidFill>
                   <a:srgbClr val="333333"/>
                 </a:solidFill>
@@ -8576,7 +8576,7 @@
               <a:t>–   </a:t>
             </a:r>
             <a:r>
-              <a:rPr sz="1600" b="1" i="0">
+              <a:rPr sz="2000" b="1" i="0">
                 <a:solidFill>
                   <a:srgbClr val="333333"/>
                 </a:solidFill>
@@ -8585,7 +8585,7 @@
               <a:t>RAA1</a:t>
             </a:r>
             <a:r>
-              <a:rPr sz="1600" b="0" i="0">
+              <a:rPr sz="2000" b="0" i="0">
                 <a:solidFill>
                   <a:srgbClr val="333333"/>
                 </a:solidFill>
@@ -8601,7 +8601,7 @@
               </a:spcAft>
             </a:pPr>
             <a:r>
-              <a:rPr sz="1600" b="0" i="0">
+              <a:rPr sz="2000" b="0" i="0">
                 <a:solidFill>
                   <a:srgbClr val="333333"/>
                 </a:solidFill>
@@ -8610,7 +8610,7 @@
               <a:t>–   </a:t>
             </a:r>
             <a:r>
-              <a:rPr sz="1600" b="1" i="0">
+              <a:rPr sz="2000" b="1" i="0">
                 <a:solidFill>
                   <a:srgbClr val="333333"/>
                 </a:solidFill>
@@ -8619,7 +8619,7 @@
               <a:t>RAA2</a:t>
             </a:r>
             <a:r>
-              <a:rPr sz="1600" b="0" i="0">
+              <a:rPr sz="2000" b="0" i="0">
                 <a:solidFill>
                   <a:srgbClr val="333333"/>
                 </a:solidFill>
@@ -8635,7 +8635,7 @@
               </a:spcAft>
             </a:pPr>
             <a:r>
-              <a:rPr sz="1600" b="0" i="0">
+              <a:rPr sz="2000" b="0" i="0">
                 <a:solidFill>
                   <a:srgbClr val="333333"/>
                 </a:solidFill>
@@ -8644,7 +8644,7 @@
               <a:t>–   </a:t>
             </a:r>
             <a:r>
-              <a:rPr sz="1600" b="1" i="0">
+              <a:rPr sz="2000" b="1" i="0">
                 <a:solidFill>
                   <a:srgbClr val="333333"/>
                 </a:solidFill>
@@ -8653,7 +8653,7 @@
               <a:t>RAA3</a:t>
             </a:r>
             <a:r>
-              <a:rPr sz="1600" b="0" i="0">
+              <a:rPr sz="2000" b="0" i="0">
                 <a:solidFill>
                   <a:srgbClr val="333333"/>
                 </a:solidFill>
@@ -8669,7 +8669,7 @@
               </a:spcAft>
             </a:pPr>
             <a:r>
-              <a:rPr sz="1600" b="0" i="0">
+              <a:rPr sz="2000" b="0" i="0">
                 <a:solidFill>
                   <a:srgbClr val="333333"/>
                 </a:solidFill>
@@ -8678,7 +8678,7 @@
               <a:t>–   </a:t>
             </a:r>
             <a:r>
-              <a:rPr sz="1600" b="1" i="0">
+              <a:rPr sz="2000" b="1" i="0">
                 <a:solidFill>
                   <a:srgbClr val="333333"/>
                 </a:solidFill>
@@ -8687,7 +8687,7 @@
               <a:t>Cómo se demuestran:</a:t>
             </a:r>
             <a:r>
-              <a:rPr sz="1600" b="0" i="0">
+              <a:rPr sz="2000" b="0" i="0">
                 <a:solidFill>
                   <a:srgbClr val="333333"/>
                 </a:solidFill>
@@ -8696,7 +8696,7 @@
               <a:t> no con un examen final, sino con el </a:t>
             </a:r>
             <a:r>
-              <a:rPr sz="1600" b="1" i="0">
+              <a:rPr sz="2000" b="1" i="0">
                 <a:solidFill>
                   <a:srgbClr val="333333"/>
                 </a:solidFill>
@@ -8705,7 +8705,7 @@
               <a:t>proyecto del equipo</a:t>
             </a:r>
             <a:r>
-              <a:rPr sz="1600" b="0" i="0">
+              <a:rPr sz="2000" b="0" i="0">
                 <a:solidFill>
                   <a:srgbClr val="333333"/>
                 </a:solidFill>
@@ -9063,7 +9063,7 @@
         <p:spPr>
           <a:xfrm>
             <a:off x="502920" y="2798064"/>
-            <a:ext cx="2164019" cy="2560320"/>
+            <a:ext cx="2164019" cy="3099816"/>
           </a:xfrm>
           <a:prstGeom prst="rect">
             <a:avLst/>
@@ -9187,7 +9187,7 @@
         <p:spPr>
           <a:xfrm>
             <a:off x="2758379" y="2798064"/>
-            <a:ext cx="2164019" cy="2560320"/>
+            <a:ext cx="2164019" cy="3099816"/>
           </a:xfrm>
           <a:prstGeom prst="rect">
             <a:avLst/>
@@ -9311,7 +9311,7 @@
         <p:spPr>
           <a:xfrm>
             <a:off x="5013838" y="2798064"/>
-            <a:ext cx="2164019" cy="2560320"/>
+            <a:ext cx="2164019" cy="3099816"/>
           </a:xfrm>
           <a:prstGeom prst="rect">
             <a:avLst/>
@@ -9435,7 +9435,7 @@
         <p:spPr>
           <a:xfrm>
             <a:off x="7269297" y="2798064"/>
-            <a:ext cx="2164019" cy="2560320"/>
+            <a:ext cx="2164019" cy="3099816"/>
           </a:xfrm>
           <a:prstGeom prst="rect">
             <a:avLst/>
@@ -9559,7 +9559,7 @@
         <p:spPr>
           <a:xfrm>
             <a:off x="9524756" y="2798064"/>
-            <a:ext cx="2164019" cy="2560320"/>
+            <a:ext cx="2164019" cy="3099816"/>
           </a:xfrm>
           <a:prstGeom prst="rect">
             <a:avLst/>
@@ -9602,8 +9602,8 @@
         </p:nvSpPr>
         <p:spPr>
           <a:xfrm>
-            <a:off x="457200" y="5943600"/>
-            <a:ext cx="11277295" cy="365760"/>
+            <a:off x="457200" y="5806440"/>
+            <a:ext cx="11277295" cy="640080"/>
           </a:xfrm>
           <a:prstGeom prst="rect">
             <a:avLst/>
@@ -10684,7 +10684,7 @@
               </a:spcAft>
             </a:pPr>
             <a:r>
-              <a:rPr sz="1600" b="0" i="0">
+              <a:rPr sz="2000" b="0" i="0">
                 <a:solidFill>
                   <a:srgbClr val="333333"/>
                 </a:solidFill>
@@ -10693,7 +10693,7 @@
               <a:t>–   </a:t>
             </a:r>
             <a:r>
-              <a:rPr sz="1600" b="1" i="0">
+              <a:rPr sz="2000" b="1" i="0">
                 <a:solidFill>
                   <a:srgbClr val="333333"/>
                 </a:solidFill>
@@ -10702,7 +10702,7 @@
               <a:t>Lo fijo son los equipos: 5.</a:t>
             </a:r>
             <a:r>
-              <a:rPr sz="1600" b="0" i="0">
+              <a:rPr sz="2000" b="0" i="0">
                 <a:solidFill>
                   <a:srgbClr val="333333"/>
                 </a:solidFill>
@@ -10711,7 +10711,7 @@
               <a:t> Lo que cambia con la cantidad de matriculados es </a:t>
             </a:r>
             <a:r>
-              <a:rPr sz="1600" b="1" i="0">
+              <a:rPr sz="2000" b="1" i="0">
                 <a:solidFill>
                   <a:srgbClr val="333333"/>
                 </a:solidFill>
@@ -10720,7 +10720,7 @@
               <a:t>cuánta gente hay en cada uno</a:t>
             </a:r>
             <a:r>
-              <a:rPr sz="1600" b="0" i="0">
+              <a:rPr sz="2000" b="0" i="0">
                 <a:solidFill>
                   <a:srgbClr val="333333"/>
                 </a:solidFill>
@@ -10736,7 +10736,7 @@
               </a:spcAft>
             </a:pPr>
             <a:r>
-              <a:rPr sz="1600" b="0" i="0">
+              <a:rPr sz="2000" b="0" i="0">
                 <a:solidFill>
                   <a:srgbClr val="333333"/>
                 </a:solidFill>
@@ -10745,7 +10745,7 @@
               <a:t>–   </a:t>
             </a:r>
             <a:r>
-              <a:rPr sz="1600" b="1" i="0">
+              <a:rPr sz="2000" b="1" i="0">
                 <a:solidFill>
                   <a:srgbClr val="333333"/>
                 </a:solidFill>
@@ -10754,7 +10754,7 @@
               <a:t>5 equipos × 3 min = 15 min de exposiciones.</a:t>
             </a:r>
             <a:r>
-              <a:rPr sz="1600" b="0" i="0">
+              <a:rPr sz="2000" b="0" i="0">
                 <a:solidFill>
                   <a:srgbClr val="333333"/>
                 </a:solidFill>
@@ -10770,7 +10770,7 @@
               </a:spcAft>
             </a:pPr>
             <a:r>
-              <a:rPr sz="1600" b="0" i="0">
+              <a:rPr sz="2000" b="0" i="0">
                 <a:solidFill>
                   <a:srgbClr val="333333"/>
                 </a:solidFill>
@@ -10779,7 +10779,7 @@
               <a:t>–   Si lo fijo fuera el tamaño («de 4 en 4»), un grupo de 35 daría </a:t>
             </a:r>
             <a:r>
-              <a:rPr sz="1600" b="1" i="0">
+              <a:rPr sz="2000" b="1" i="0">
                 <a:solidFill>
                   <a:srgbClr val="333333"/>
                 </a:solidFill>
@@ -10788,7 +10788,7 @@
               <a:t>9 equipos = 27 min</a:t>
             </a:r>
             <a:r>
-              <a:rPr sz="1600" b="0" i="0">
+              <a:rPr sz="2000" b="0" i="0">
                 <a:solidFill>
                   <a:srgbClr val="333333"/>
                 </a:solidFill>
@@ -10804,7 +10804,7 @@
               </a:spcAft>
             </a:pPr>
             <a:r>
-              <a:rPr sz="1600" b="0" i="0">
+              <a:rPr sz="2000" b="0" i="0">
                 <a:solidFill>
                   <a:srgbClr val="333333"/>
                 </a:solidFill>
@@ -10813,7 +10813,7 @@
               <a:t>–   Con </a:t>
             </a:r>
             <a:r>
-              <a:rPr sz="1600" b="1" i="0">
+              <a:rPr sz="2000" b="1" i="0">
                 <a:solidFill>
                   <a:srgbClr val="333333"/>
                 </a:solidFill>
@@ -10822,7 +10822,7 @@
               <a:t>20</a:t>
             </a:r>
             <a:r>
-              <a:rPr sz="1600" b="0" i="0">
+              <a:rPr sz="2000" b="0" i="0">
                 <a:solidFill>
                   <a:srgbClr val="333333"/>
                 </a:solidFill>
@@ -10831,7 +10831,7 @@
               <a:t> matriculados, equipos de </a:t>
             </a:r>
             <a:r>
-              <a:rPr sz="1600" b="1" i="0">
+              <a:rPr sz="2000" b="1" i="0">
                 <a:solidFill>
                   <a:srgbClr val="333333"/>
                 </a:solidFill>
@@ -10840,7 +10840,7 @@
               <a:t>4</a:t>
             </a:r>
             <a:r>
-              <a:rPr sz="1600" b="0" i="0">
+              <a:rPr sz="2000" b="0" i="0">
                 <a:solidFill>
                   <a:srgbClr val="333333"/>
                 </a:solidFill>
@@ -10849,7 +10849,7 @@
               <a:t>; con </a:t>
             </a:r>
             <a:r>
-              <a:rPr sz="1600" b="1" i="0">
+              <a:rPr sz="2000" b="1" i="0">
                 <a:solidFill>
                   <a:srgbClr val="333333"/>
                 </a:solidFill>
@@ -10858,7 +10858,7 @@
               <a:t>25</a:t>
             </a:r>
             <a:r>
-              <a:rPr sz="1600" b="0" i="0">
+              <a:rPr sz="2000" b="0" i="0">
                 <a:solidFill>
                   <a:srgbClr val="333333"/>
                 </a:solidFill>
@@ -10867,7 +10867,7 @@
               <a:t>, de </a:t>
             </a:r>
             <a:r>
-              <a:rPr sz="1600" b="1" i="0">
+              <a:rPr sz="2000" b="1" i="0">
                 <a:solidFill>
                   <a:srgbClr val="333333"/>
                 </a:solidFill>
@@ -10876,7 +10876,7 @@
               <a:t>5</a:t>
             </a:r>
             <a:r>
-              <a:rPr sz="1600" b="0" i="0">
+              <a:rPr sz="2000" b="0" i="0">
                 <a:solidFill>
                   <a:srgbClr val="333333"/>
                 </a:solidFill>
@@ -10885,7 +10885,7 @@
               <a:t>; con </a:t>
             </a:r>
             <a:r>
-              <a:rPr sz="1600" b="1" i="0">
+              <a:rPr sz="2000" b="1" i="0">
                 <a:solidFill>
                   <a:srgbClr val="333333"/>
                 </a:solidFill>
@@ -10894,7 +10894,7 @@
               <a:t>30</a:t>
             </a:r>
             <a:r>
-              <a:rPr sz="1600" b="0" i="0">
+              <a:rPr sz="2000" b="0" i="0">
                 <a:solidFill>
                   <a:srgbClr val="333333"/>
                 </a:solidFill>
@@ -10903,7 +10903,7 @@
               <a:t>, de </a:t>
             </a:r>
             <a:r>
-              <a:rPr sz="1600" b="1" i="0">
+              <a:rPr sz="2000" b="1" i="0">
                 <a:solidFill>
                   <a:srgbClr val="333333"/>
                 </a:solidFill>
@@ -10912,7 +10912,7 @@
               <a:t>6</a:t>
             </a:r>
             <a:r>
-              <a:rPr sz="1600" b="0" i="0">
+              <a:rPr sz="2000" b="0" i="0">
                 <a:solidFill>
                   <a:srgbClr val="333333"/>
                 </a:solidFill>
@@ -10921,7 +10921,7 @@
               <a:t>; con </a:t>
             </a:r>
             <a:r>
-              <a:rPr sz="1600" b="1" i="0">
+              <a:rPr sz="2000" b="1" i="0">
                 <a:solidFill>
                   <a:srgbClr val="333333"/>
                 </a:solidFill>
@@ -10930,7 +10930,7 @@
               <a:t>35</a:t>
             </a:r>
             <a:r>
-              <a:rPr sz="1600" b="0" i="0">
+              <a:rPr sz="2000" b="0" i="0">
                 <a:solidFill>
                   <a:srgbClr val="333333"/>
                 </a:solidFill>
@@ -10939,7 +10939,7 @@
               <a:t>, de </a:t>
             </a:r>
             <a:r>
-              <a:rPr sz="1600" b="1" i="0">
+              <a:rPr sz="2000" b="1" i="0">
                 <a:solidFill>
                   <a:srgbClr val="333333"/>
                 </a:solidFill>
@@ -10948,7 +10948,7 @@
               <a:t>7</a:t>
             </a:r>
             <a:r>
-              <a:rPr sz="1600" b="0" i="0">
+              <a:rPr sz="2000" b="0" i="0">
                 <a:solidFill>
                   <a:srgbClr val="333333"/>
                 </a:solidFill>
@@ -10964,7 +10964,7 @@
               </a:spcAft>
             </a:pPr>
             <a:r>
-              <a:rPr sz="1600" b="0" i="0">
+              <a:rPr sz="2000" b="0" i="0">
                 <a:solidFill>
                   <a:srgbClr val="333333"/>
                 </a:solidFill>
@@ -10973,7 +10973,7 @@
               <a:t>–   </a:t>
             </a:r>
             <a:r>
-              <a:rPr sz="1600" b="1" i="0">
+              <a:rPr sz="2000" b="1" i="0">
                 <a:solidFill>
                   <a:srgbClr val="333333"/>
                 </a:solidFill>
@@ -10982,7 +10982,7 @@
               <a:t>Los equipos son estables todo el semestre</a:t>
             </a:r>
             <a:r>
-              <a:rPr sz="1600" b="0" i="0">
+              <a:rPr sz="2000" b="0" i="0">
                 <a:solidFill>
                   <a:srgbClr val="333333"/>
                 </a:solidFill>
@@ -10991,7 +10991,7 @@
               <a:t> (el proyecto es del equipo), pero el </a:t>
             </a:r>
             <a:r>
-              <a:rPr sz="1600" b="1" i="0">
+              <a:rPr sz="2000" b="1" i="0">
                 <a:solidFill>
                   <a:srgbClr val="333333"/>
                 </a:solidFill>
@@ -11000,7 +11000,7 @@
               <a:t>vocero rota</a:t>
             </a:r>
             <a:r>
-              <a:rPr sz="1600" b="0" i="0">
+              <a:rPr sz="2000" b="0" i="0">
                 <a:solidFill>
                   <a:srgbClr val="333333"/>
                 </a:solidFill>
@@ -11016,7 +11016,7 @@
               </a:spcAft>
             </a:pPr>
             <a:r>
-              <a:rPr sz="1600" b="0" i="0">
+              <a:rPr sz="2000" b="0" i="0">
                 <a:solidFill>
                   <a:srgbClr val="333333"/>
                 </a:solidFill>
@@ -11025,7 +11025,7 @@
               <a:t>–   </a:t>
             </a:r>
             <a:r>
-              <a:rPr sz="1600" b="1" i="0">
+              <a:rPr sz="2000" b="1" i="0">
                 <a:solidFill>
                   <a:srgbClr val="333333"/>
                 </a:solidFill>
@@ -11034,7 +11034,7 @@
               <a:t>Todos los equipos exponen todas las sesiones.</a:t>
             </a:r>
             <a:r>
-              <a:rPr sz="1600" b="0" i="0">
+              <a:rPr sz="2000" b="0" i="0">
                 <a:solidFill>
                   <a:srgbClr val="333333"/>
                 </a:solidFill>

--- a/Introduccion a la Ingenieria/Clases/Presentacion del Curso - Introduccion a la Ingenieria - SB141B.pptx
+++ b/Introduccion a la Ingenieria/Clases/Presentacion del Curso - Introduccion a la Ingenieria - SB141B.pptx
@@ -12791,7 +12791,7 @@
                 </a:solidFill>
                 <a:latin typeface="Calibri"/>
               </a:rPr>
-              <a:t>Diagnóstico de la sesión 1, comprobaciones rápidas de lectura y las dos evaluaciones de corte escritas (sesiones 6 y 11)</a:t>
+              <a:t>Entrega del taller de equipo de las 16 sesiones (5 preguntas, 100 puntos), el diagnóstico de la sesión 1 y las dos evaluaciones de corte escritas (sesiones 6 y 11)</a:t>
             </a:r>
           </a:p>
         </p:txBody>

--- a/Introduccion a la Ingenieria/Clases/Presentacion del Curso - Introduccion a la Ingenieria - SB141B.pptx
+++ b/Introduccion a la Ingenieria/Clases/Presentacion del Curso - Introduccion a la Ingenieria - SB141B.pptx
@@ -5163,7 +5163,7 @@
                 </a:solidFill>
                 <a:latin typeface="Calibri"/>
               </a:rPr>
-              <a:t>03/09 – 08/10/2026 · sesiones 1-6</a:t>
+              <a:t>10/09 – 15/10/2026 · sesiones 1-6</a:t>
             </a:r>
           </a:p>
         </p:txBody>
@@ -5434,7 +5434,7 @@
                 </a:solidFill>
                 <a:latin typeface="Calibri"/>
               </a:rPr>
-              <a:t>15/10 – 12/11/2026 · sesiones 7-11</a:t>
+              <a:t>22/10 – 19/11/2026 · sesiones 7-11</a:t>
             </a:r>
           </a:p>
         </p:txBody>
@@ -5705,7 +5705,7 @@
                 </a:solidFill>
                 <a:latin typeface="Calibri"/>
               </a:rPr>
-              <a:t>19/11 – 17/12/2026 · sesiones 12-16</a:t>
+              <a:t>26/11 – 24/12/2026 · sesiones 12-16</a:t>
             </a:r>
           </a:p>
         </p:txBody>
@@ -5819,7 +5819,7 @@
                 </a:solidFill>
                 <a:latin typeface="Calibri"/>
               </a:rPr>
-              <a:t>Cada corte cierra en la sesión 6 / 11 / 16 (08/10/2026 / 12/11/2026 / 17/12/2026). La evaluación es </a:t>
+              <a:t>Cada corte cierra en la sesión 6 / 11 / 16 (15/10/2026 / 19/11/2026 / 24/12/2026). La evaluación es </a:t>
             </a:r>
             <a:r>
               <a:rPr sz="1050" b="1" i="1">
@@ -6069,7 +6069,7 @@
                 </a:solidFill>
                 <a:latin typeface="Calibri"/>
               </a:rPr>
-              <a:t> de 90 min · Jueves · 03/09/2026 a 17/12/2026</a:t>
+              <a:t> de 90 min · Jueves · 10/09/2026 a 24/12/2026</a:t>
             </a:r>
           </a:p>
         </p:txBody>
@@ -6126,7 +6126,7 @@
                 </a:solidFill>
                 <a:latin typeface="Calibri"/>
               </a:rPr>
-              <a:t> Presentación del curso: encuadre, evaluación, equipos y plataformas (03/09) · mismo bloque de la Sesión 1</a:t>
+              <a:t> Presentación del curso: encuadre, evaluación, equipos y plataformas (10/09) · mismo bloque de la Sesión 1</a:t>
             </a:r>
           </a:p>
           <a:p>
@@ -6160,7 +6160,7 @@
                 </a:solidFill>
                 <a:latin typeface="Calibri"/>
               </a:rPr>
-              <a:t> Presentación del curso y diagnóstico inicial (03/09)</a:t>
+              <a:t> Presentación del curso y diagnóstico inicial (10/09)</a:t>
             </a:r>
           </a:p>
           <a:p>
@@ -6194,7 +6194,7 @@
                 </a:solidFill>
                 <a:latin typeface="Calibri"/>
               </a:rPr>
-              <a:t> Historia y evolución de la Ingeniería (10/09)</a:t>
+              <a:t> Historia y evolución de la Ingeniería (17/09)</a:t>
             </a:r>
           </a:p>
           <a:p>
@@ -6228,7 +6228,7 @@
                 </a:solidFill>
                 <a:latin typeface="Calibri"/>
               </a:rPr>
-              <a:t> Fundamentos básicos de la Ingeniería de Sistemas (17/09)</a:t>
+              <a:t> Fundamentos básicos de la Ingeniería de Sistemas (24/09)</a:t>
             </a:r>
           </a:p>
           <a:p>
@@ -6262,7 +6262,7 @@
                 </a:solidFill>
                 <a:latin typeface="Calibri"/>
               </a:rPr>
-              <a:t> Principios éticos en la Ingeniería (24/09)</a:t>
+              <a:t> Principios éticos en la Ingeniería (01/10)</a:t>
             </a:r>
           </a:p>
           <a:p>
@@ -6296,7 +6296,7 @@
                 </a:solidFill>
                 <a:latin typeface="Calibri"/>
               </a:rPr>
-              <a:t> El rol del ingeniero en el contexto ambiental (01/10)</a:t>
+              <a:t> El rol del ingeniero en el contexto ambiental (08/10)</a:t>
             </a:r>
           </a:p>
           <a:p>
@@ -6330,7 +6330,7 @@
                 </a:solidFill>
                 <a:latin typeface="Calibri"/>
               </a:rPr>
-              <a:t> Análisis de problemas tecnológicos del entorno (08/10) · cierra Corte 1 (30%)</a:t>
+              <a:t> Análisis de problemas tecnológicos del entorno (15/10) · cierra Corte 1 (30%)</a:t>
             </a:r>
           </a:p>
           <a:p>
@@ -6364,7 +6364,7 @@
                 </a:solidFill>
                 <a:latin typeface="Calibri"/>
               </a:rPr>
-              <a:t> Ciclo de vida de los proyectos de ingeniería (15/10)</a:t>
+              <a:t> Ciclo de vida de los proyectos de ingeniería (22/10)</a:t>
             </a:r>
           </a:p>
           <a:p>
@@ -6398,7 +6398,7 @@
                 </a:solidFill>
                 <a:latin typeface="Calibri"/>
               </a:rPr>
-              <a:t> Taller de aplicación del ciclo de vida (22/10)</a:t>
+              <a:t> Taller de aplicación del ciclo de vida (29/10)</a:t>
             </a:r>
           </a:p>
         </p:txBody>
@@ -6455,7 +6455,7 @@
                 </a:solidFill>
                 <a:latin typeface="Calibri"/>
               </a:rPr>
-              <a:t> Estrategias de innovación en Ingeniería (29/10)</a:t>
+              <a:t> Estrategias de innovación en Ingeniería (05/11)</a:t>
             </a:r>
           </a:p>
           <a:p>
@@ -6489,7 +6489,7 @@
                 </a:solidFill>
                 <a:latin typeface="Calibri"/>
               </a:rPr>
-              <a:t> Herramientas digitales aplicadas a la Ingeniería (05/11)</a:t>
+              <a:t> Herramientas digitales aplicadas a la Ingeniería (12/11)</a:t>
             </a:r>
           </a:p>
           <a:p>
@@ -6523,7 +6523,7 @@
                 </a:solidFill>
                 <a:latin typeface="Calibri"/>
               </a:rPr>
-              <a:t> Taller de prototipado inicial con IA (12/11) · cierra Corte 2 (30%)</a:t>
+              <a:t> Taller de prototipado inicial con IA (19/11) · cierra Corte 2 (30%)</a:t>
             </a:r>
           </a:p>
           <a:p>
@@ -6557,7 +6557,7 @@
                 </a:solidFill>
                 <a:latin typeface="Calibri"/>
               </a:rPr>
-              <a:t> Presentación de avances de proyectos (19/11)</a:t>
+              <a:t> Presentación de avances de proyectos (26/11)</a:t>
             </a:r>
           </a:p>
           <a:p>
@@ -6591,7 +6591,7 @@
                 </a:solidFill>
                 <a:latin typeface="Calibri"/>
               </a:rPr>
-              <a:t> Evaluación de impacto social y ambiental (26/11)</a:t>
+              <a:t> Evaluación de impacto social y ambiental (03/12)</a:t>
             </a:r>
           </a:p>
           <a:p>
@@ -6625,7 +6625,7 @@
                 </a:solidFill>
                 <a:latin typeface="Calibri"/>
               </a:rPr>
-              <a:t> Preparación de la presentación final (03/12)</a:t>
+              <a:t> Preparación de la presentación final (10/12)</a:t>
             </a:r>
           </a:p>
           <a:p>
@@ -6659,7 +6659,7 @@
                 </a:solidFill>
                 <a:latin typeface="Calibri"/>
               </a:rPr>
-              <a:t> Exposición final de proyectos (10/12)</a:t>
+              <a:t> Exposición final de proyectos (17/12)</a:t>
             </a:r>
           </a:p>
           <a:p>
@@ -6693,7 +6693,7 @@
                 </a:solidFill>
                 <a:latin typeface="Calibri"/>
               </a:rPr>
-              <a:t> Socialización y evaluación final del curso (17/12) · cierra Corte 3 (40%)</a:t>
+              <a:t> Socialización y evaluación final del curso (24/12) · cierra Corte 3 (40%)</a:t>
             </a:r>
           </a:p>
         </p:txBody>

--- a/Introduccion a la Ingenieria/Clases/Presentacion del Curso - Introduccion a la Ingenieria - SB141B.pptx
+++ b/Introduccion a la Ingenieria/Clases/Presentacion del Curso - Introduccion a la Ingenieria - SB141B.pptx
@@ -3747,7 +3747,7 @@
                 </a:solidFill>
                 <a:latin typeface="Calibri"/>
               </a:rPr>
-              <a:t>Aplican a las 16 sesiones · se recuerdan solo hoy</a:t>
+              <a:t>Aplican a las 11 sesiones · se recuerdan solo hoy</a:t>
             </a:r>
           </a:p>
         </p:txBody>
@@ -5163,7 +5163,7 @@
                 </a:solidFill>
                 <a:latin typeface="Calibri"/>
               </a:rPr>
-              <a:t>10/09 – 15/10/2026 · sesiones 1-6</a:t>
+              <a:t>10/09 – 01/10/2026 · sesiones 1-4</a:t>
             </a:r>
           </a:p>
         </p:txBody>
@@ -5211,7 +5211,7 @@
                 </a:solidFill>
                 <a:latin typeface="Calibri"/>
               </a:rPr>
-              <a:t>Evaluación de corte (sesión 6) · 10%</a:t>
+              <a:t>Evaluación de corte (sesión 4) · 10%</a:t>
             </a:r>
           </a:p>
           <a:p>
@@ -5434,7 +5434,7 @@
                 </a:solidFill>
                 <a:latin typeface="Calibri"/>
               </a:rPr>
-              <a:t>22/10 – 19/11/2026 · sesiones 7-11</a:t>
+              <a:t>08/10 – 22/10/2026 · sesiones 5-7</a:t>
             </a:r>
           </a:p>
         </p:txBody>
@@ -5482,7 +5482,7 @@
                 </a:solidFill>
                 <a:latin typeface="Calibri"/>
               </a:rPr>
-              <a:t>Evaluación de corte (sesión 11) · 10%</a:t>
+              <a:t>Evaluación de corte (sesión 7) · 10%</a:t>
             </a:r>
           </a:p>
           <a:p>
@@ -5705,7 +5705,7 @@
                 </a:solidFill>
                 <a:latin typeface="Calibri"/>
               </a:rPr>
-              <a:t>26/11 – 24/12/2026 · sesiones 12-16</a:t>
+              <a:t>29/10 – 19/11/2026 · sesiones 8-11</a:t>
             </a:r>
           </a:p>
         </p:txBody>
@@ -5753,7 +5753,7 @@
                 </a:solidFill>
                 <a:latin typeface="Calibri"/>
               </a:rPr>
-              <a:t>Exposición final del proyecto (sesión 15) · 15%</a:t>
+              <a:t>Exposición final del proyecto — Clase 15 (sesión 11) · 15%</a:t>
             </a:r>
           </a:p>
           <a:p>
@@ -5769,7 +5769,7 @@
                 </a:solidFill>
                 <a:latin typeface="Calibri"/>
               </a:rPr>
-              <a:t>–   Informe final del proyecto (sesión 16) · 20%</a:t>
+              <a:t>–   Informe final del proyecto — Clase 16 (sesión 11) · 20%</a:t>
             </a:r>
           </a:p>
           <a:p>
@@ -5819,7 +5819,7 @@
                 </a:solidFill>
                 <a:latin typeface="Calibri"/>
               </a:rPr>
-              <a:t>Cada corte cierra en la sesión 6 / 11 / 16 (15/10/2026 / 19/11/2026 / 24/12/2026). La evaluación es </a:t>
+              <a:t>Cada corte cierra en la sesión 4 / 7 / 11 (01/10/2026 / 22/10/2026 / 19/11/2026). La evaluación es </a:t>
             </a:r>
             <a:r>
               <a:rPr sz="1050" b="1" i="1">
@@ -6060,7 +6060,7 @@
                 </a:solidFill>
                 <a:latin typeface="Calibri"/>
               </a:rPr>
-              <a:t>16 sesiones</a:t>
+              <a:t>11 sesiones</a:t>
             </a:r>
             <a:r>
               <a:rPr sz="1300" b="0" i="0">
@@ -6069,7 +6069,7 @@
                 </a:solidFill>
                 <a:latin typeface="Calibri"/>
               </a:rPr>
-              <a:t> de 90 min · Jueves · 10/09/2026 a 24/12/2026</a:t>
+              <a:t> de 90 min · Jueves · 10/09/2026 a 19/11/2026</a:t>
             </a:r>
           </a:p>
         </p:txBody>
@@ -6098,11 +6098,11 @@
           <a:p>
             <a:pPr>
               <a:spcAft>
-                <a:spcPts val="600"/>
+                <a:spcPts val="900"/>
               </a:spcAft>
             </a:pPr>
             <a:r>
-              <a:rPr sz="1100" b="0" i="0">
+              <a:rPr sz="1200" b="0" i="0">
                 <a:solidFill>
                   <a:srgbClr val="333333"/>
                 </a:solidFill>
@@ -6111,7 +6111,7 @@
               <a:t>–   </a:t>
             </a:r>
             <a:r>
-              <a:rPr sz="1100" b="1" i="0">
+              <a:rPr sz="1200" b="1" i="0">
                 <a:solidFill>
                   <a:srgbClr val="333333"/>
                 </a:solidFill>
@@ -6120,7 +6120,7 @@
               <a:t>Sesión 0 –</a:t>
             </a:r>
             <a:r>
-              <a:rPr sz="1100" b="0" i="0">
+              <a:rPr sz="1200" b="0" i="0">
                 <a:solidFill>
                   <a:srgbClr val="333333"/>
                 </a:solidFill>
@@ -6132,11 +6132,11 @@
           <a:p>
             <a:pPr>
               <a:spcAft>
-                <a:spcPts val="600"/>
+                <a:spcPts val="900"/>
               </a:spcAft>
             </a:pPr>
             <a:r>
-              <a:rPr sz="1100" b="0" i="0">
+              <a:rPr sz="1200" b="0" i="0">
                 <a:solidFill>
                   <a:srgbClr val="333333"/>
                 </a:solidFill>
@@ -6145,7 +6145,7 @@
               <a:t>–   </a:t>
             </a:r>
             <a:r>
-              <a:rPr sz="1100" b="1" i="0">
+              <a:rPr sz="1200" b="1" i="0">
                 <a:solidFill>
                   <a:srgbClr val="333333"/>
                 </a:solidFill>
@@ -6154,7 +6154,7 @@
               <a:t>Sesión 1 –</a:t>
             </a:r>
             <a:r>
-              <a:rPr sz="1100" b="0" i="0">
+              <a:rPr sz="1200" b="0" i="0">
                 <a:solidFill>
                   <a:srgbClr val="333333"/>
                 </a:solidFill>
@@ -6166,11 +6166,11 @@
           <a:p>
             <a:pPr>
               <a:spcAft>
-                <a:spcPts val="600"/>
+                <a:spcPts val="900"/>
               </a:spcAft>
             </a:pPr>
             <a:r>
-              <a:rPr sz="1100" b="0" i="0">
+              <a:rPr sz="1200" b="0" i="0">
                 <a:solidFill>
                   <a:srgbClr val="333333"/>
                 </a:solidFill>
@@ -6179,7 +6179,7 @@
               <a:t>–   </a:t>
             </a:r>
             <a:r>
-              <a:rPr sz="1100" b="1" i="0">
+              <a:rPr sz="1200" b="1" i="0">
                 <a:solidFill>
                   <a:srgbClr val="333333"/>
                 </a:solidFill>
@@ -6188,23 +6188,23 @@
               <a:t>Sesión 2 –</a:t>
             </a:r>
             <a:r>
-              <a:rPr sz="1100" b="0" i="0">
-                <a:solidFill>
-                  <a:srgbClr val="333333"/>
-                </a:solidFill>
-                <a:latin typeface="Calibri"/>
-              </a:rPr>
-              <a:t> Historia y evolución de la Ingeniería (17/09)</a:t>
+              <a:rPr sz="1200" b="0" i="0">
+                <a:solidFill>
+                  <a:srgbClr val="333333"/>
+                </a:solidFill>
+                <a:latin typeface="Calibri"/>
+              </a:rPr>
+              <a:t> Historia y evolución de la Ingeniería + Fundamentos básicos de la Ingeniería de Sistemas (17/09) · sesión doble</a:t>
             </a:r>
           </a:p>
           <a:p>
             <a:pPr>
               <a:spcAft>
-                <a:spcPts val="600"/>
+                <a:spcPts val="900"/>
               </a:spcAft>
             </a:pPr>
             <a:r>
-              <a:rPr sz="1100" b="0" i="0">
+              <a:rPr sz="1200" b="0" i="0">
                 <a:solidFill>
                   <a:srgbClr val="333333"/>
                 </a:solidFill>
@@ -6213,7 +6213,7 @@
               <a:t>–   </a:t>
             </a:r>
             <a:r>
-              <a:rPr sz="1100" b="1" i="0">
+              <a:rPr sz="1200" b="1" i="0">
                 <a:solidFill>
                   <a:srgbClr val="333333"/>
                 </a:solidFill>
@@ -6222,23 +6222,23 @@
               <a:t>Sesión 3 –</a:t>
             </a:r>
             <a:r>
-              <a:rPr sz="1100" b="0" i="0">
-                <a:solidFill>
-                  <a:srgbClr val="333333"/>
-                </a:solidFill>
-                <a:latin typeface="Calibri"/>
-              </a:rPr>
-              <a:t> Fundamentos básicos de la Ingeniería de Sistemas (24/09)</a:t>
+              <a:rPr sz="1200" b="0" i="0">
+                <a:solidFill>
+                  <a:srgbClr val="333333"/>
+                </a:solidFill>
+                <a:latin typeface="Calibri"/>
+              </a:rPr>
+              <a:t> Principios éticos en la Ingeniería + El rol del ingeniero en el contexto ambiental (24/09) · sesión doble</a:t>
             </a:r>
           </a:p>
           <a:p>
             <a:pPr>
               <a:spcAft>
-                <a:spcPts val="600"/>
+                <a:spcPts val="900"/>
               </a:spcAft>
             </a:pPr>
             <a:r>
-              <a:rPr sz="1100" b="0" i="0">
+              <a:rPr sz="1200" b="0" i="0">
                 <a:solidFill>
                   <a:srgbClr val="333333"/>
                 </a:solidFill>
@@ -6247,7 +6247,7 @@
               <a:t>–   </a:t>
             </a:r>
             <a:r>
-              <a:rPr sz="1100" b="1" i="0">
+              <a:rPr sz="1200" b="1" i="0">
                 <a:solidFill>
                   <a:srgbClr val="333333"/>
                 </a:solidFill>
@@ -6256,23 +6256,23 @@
               <a:t>Sesión 4 –</a:t>
             </a:r>
             <a:r>
-              <a:rPr sz="1100" b="0" i="0">
-                <a:solidFill>
-                  <a:srgbClr val="333333"/>
-                </a:solidFill>
-                <a:latin typeface="Calibri"/>
-              </a:rPr>
-              <a:t> Principios éticos en la Ingeniería (01/10)</a:t>
+              <a:rPr sz="1200" b="0" i="0">
+                <a:solidFill>
+                  <a:srgbClr val="333333"/>
+                </a:solidFill>
+                <a:latin typeface="Calibri"/>
+              </a:rPr>
+              <a:t> Análisis de problemas tecnológicos del entorno (01/10) · cierra Corte 1 (30%)</a:t>
             </a:r>
           </a:p>
           <a:p>
             <a:pPr>
               <a:spcAft>
-                <a:spcPts val="600"/>
+                <a:spcPts val="900"/>
               </a:spcAft>
             </a:pPr>
             <a:r>
-              <a:rPr sz="1100" b="0" i="0">
+              <a:rPr sz="1200" b="0" i="0">
                 <a:solidFill>
                   <a:srgbClr val="333333"/>
                 </a:solidFill>
@@ -6281,7 +6281,7 @@
               <a:t>–   </a:t>
             </a:r>
             <a:r>
-              <a:rPr sz="1100" b="1" i="0">
+              <a:rPr sz="1200" b="1" i="0">
                 <a:solidFill>
                   <a:srgbClr val="333333"/>
                 </a:solidFill>
@@ -6290,115 +6290,13 @@
               <a:t>Sesión 5 –</a:t>
             </a:r>
             <a:r>
-              <a:rPr sz="1100" b="0" i="0">
-                <a:solidFill>
-                  <a:srgbClr val="333333"/>
-                </a:solidFill>
-                <a:latin typeface="Calibri"/>
-              </a:rPr>
-              <a:t> El rol del ingeniero en el contexto ambiental (08/10)</a:t>
-            </a:r>
-          </a:p>
-          <a:p>
-            <a:pPr>
-              <a:spcAft>
-                <a:spcPts val="600"/>
-              </a:spcAft>
-            </a:pPr>
-            <a:r>
-              <a:rPr sz="1100" b="0" i="0">
-                <a:solidFill>
-                  <a:srgbClr val="333333"/>
-                </a:solidFill>
-                <a:latin typeface="Calibri"/>
-              </a:rPr>
-              <a:t>–   </a:t>
-            </a:r>
-            <a:r>
-              <a:rPr sz="1100" b="1" i="0">
-                <a:solidFill>
-                  <a:srgbClr val="333333"/>
-                </a:solidFill>
-                <a:latin typeface="Calibri"/>
-              </a:rPr>
-              <a:t>Sesión 6 –</a:t>
-            </a:r>
-            <a:r>
-              <a:rPr sz="1100" b="0" i="0">
-                <a:solidFill>
-                  <a:srgbClr val="333333"/>
-                </a:solidFill>
-                <a:latin typeface="Calibri"/>
-              </a:rPr>
-              <a:t> Análisis de problemas tecnológicos del entorno (15/10) · cierra Corte 1 (30%)</a:t>
-            </a:r>
-          </a:p>
-          <a:p>
-            <a:pPr>
-              <a:spcAft>
-                <a:spcPts val="600"/>
-              </a:spcAft>
-            </a:pPr>
-            <a:r>
-              <a:rPr sz="1100" b="0" i="0">
-                <a:solidFill>
-                  <a:srgbClr val="333333"/>
-                </a:solidFill>
-                <a:latin typeface="Calibri"/>
-              </a:rPr>
-              <a:t>–   </a:t>
-            </a:r>
-            <a:r>
-              <a:rPr sz="1100" b="1" i="0">
-                <a:solidFill>
-                  <a:srgbClr val="333333"/>
-                </a:solidFill>
-                <a:latin typeface="Calibri"/>
-              </a:rPr>
-              <a:t>Sesión 7 –</a:t>
-            </a:r>
-            <a:r>
-              <a:rPr sz="1100" b="0" i="0">
-                <a:solidFill>
-                  <a:srgbClr val="333333"/>
-                </a:solidFill>
-                <a:latin typeface="Calibri"/>
-              </a:rPr>
-              <a:t> Ciclo de vida de los proyectos de ingeniería (22/10)</a:t>
-            </a:r>
-          </a:p>
-          <a:p>
-            <a:pPr>
-              <a:spcAft>
-                <a:spcPts val="600"/>
-              </a:spcAft>
-            </a:pPr>
-            <a:r>
-              <a:rPr sz="1100" b="0" i="0">
-                <a:solidFill>
-                  <a:srgbClr val="333333"/>
-                </a:solidFill>
-                <a:latin typeface="Calibri"/>
-              </a:rPr>
-              <a:t>–   </a:t>
-            </a:r>
-            <a:r>
-              <a:rPr sz="1100" b="1" i="0">
-                <a:solidFill>
-                  <a:srgbClr val="333333"/>
-                </a:solidFill>
-                <a:latin typeface="Calibri"/>
-              </a:rPr>
-              <a:t>Sesión 8 –</a:t>
-            </a:r>
-            <a:r>
-              <a:rPr sz="1100" b="0" i="0">
-                <a:solidFill>
-                  <a:srgbClr val="333333"/>
-                </a:solidFill>
-                <a:latin typeface="Calibri"/>
-              </a:rPr>
-              <a:t> Taller de aplicación del ciclo de vida (29/10)</a:t>
+              <a:rPr sz="1200" b="0" i="0">
+                <a:solidFill>
+                  <a:srgbClr val="333333"/>
+                </a:solidFill>
+                <a:latin typeface="Calibri"/>
+              </a:rPr>
+              <a:t> Ciclo de vida de los proyectos de ingeniería + Taller de aplicación del ciclo de vida (08/10) · sesión doble</a:t>
             </a:r>
           </a:p>
         </p:txBody>
@@ -6427,11 +6325,11 @@
           <a:p>
             <a:pPr>
               <a:spcAft>
-                <a:spcPts val="600"/>
+                <a:spcPts val="900"/>
               </a:spcAft>
             </a:pPr>
             <a:r>
-              <a:rPr sz="1100" b="0" i="0">
+              <a:rPr sz="1200" b="0" i="0">
                 <a:solidFill>
                   <a:srgbClr val="333333"/>
                 </a:solidFill>
@@ -6440,32 +6338,32 @@
               <a:t>–   </a:t>
             </a:r>
             <a:r>
-              <a:rPr sz="1100" b="1" i="0">
-                <a:solidFill>
-                  <a:srgbClr val="333333"/>
-                </a:solidFill>
-                <a:latin typeface="Calibri"/>
-              </a:rPr>
-              <a:t>Sesión 9 –</a:t>
-            </a:r>
-            <a:r>
-              <a:rPr sz="1100" b="0" i="0">
-                <a:solidFill>
-                  <a:srgbClr val="333333"/>
-                </a:solidFill>
-                <a:latin typeface="Calibri"/>
-              </a:rPr>
-              <a:t> Estrategias de innovación en Ingeniería (05/11)</a:t>
+              <a:rPr sz="1200" b="1" i="0">
+                <a:solidFill>
+                  <a:srgbClr val="333333"/>
+                </a:solidFill>
+                <a:latin typeface="Calibri"/>
+              </a:rPr>
+              <a:t>Sesión 6 –</a:t>
+            </a:r>
+            <a:r>
+              <a:rPr sz="1200" b="0" i="0">
+                <a:solidFill>
+                  <a:srgbClr val="333333"/>
+                </a:solidFill>
+                <a:latin typeface="Calibri"/>
+              </a:rPr>
+              <a:t> Estrategias de innovación en Ingeniería + Herramientas digitales aplicadas a la Ingeniería (15/10) · sesión doble</a:t>
             </a:r>
           </a:p>
           <a:p>
             <a:pPr>
               <a:spcAft>
-                <a:spcPts val="600"/>
+                <a:spcPts val="900"/>
               </a:spcAft>
             </a:pPr>
             <a:r>
-              <a:rPr sz="1100" b="0" i="0">
+              <a:rPr sz="1200" b="0" i="0">
                 <a:solidFill>
                   <a:srgbClr val="333333"/>
                 </a:solidFill>
@@ -6474,32 +6372,32 @@
               <a:t>–   </a:t>
             </a:r>
             <a:r>
-              <a:rPr sz="1100" b="1" i="0">
-                <a:solidFill>
-                  <a:srgbClr val="333333"/>
-                </a:solidFill>
-                <a:latin typeface="Calibri"/>
-              </a:rPr>
-              <a:t>Sesión 10 –</a:t>
-            </a:r>
-            <a:r>
-              <a:rPr sz="1100" b="0" i="0">
-                <a:solidFill>
-                  <a:srgbClr val="333333"/>
-                </a:solidFill>
-                <a:latin typeface="Calibri"/>
-              </a:rPr>
-              <a:t> Herramientas digitales aplicadas a la Ingeniería (12/11)</a:t>
+              <a:rPr sz="1200" b="1" i="0">
+                <a:solidFill>
+                  <a:srgbClr val="333333"/>
+                </a:solidFill>
+                <a:latin typeface="Calibri"/>
+              </a:rPr>
+              <a:t>Sesión 7 –</a:t>
+            </a:r>
+            <a:r>
+              <a:rPr sz="1200" b="0" i="0">
+                <a:solidFill>
+                  <a:srgbClr val="333333"/>
+                </a:solidFill>
+                <a:latin typeface="Calibri"/>
+              </a:rPr>
+              <a:t> Taller de prototipado inicial con IA (22/10) · cierra Corte 2 (30%)</a:t>
             </a:r>
           </a:p>
           <a:p>
             <a:pPr>
               <a:spcAft>
-                <a:spcPts val="600"/>
+                <a:spcPts val="900"/>
               </a:spcAft>
             </a:pPr>
             <a:r>
-              <a:rPr sz="1100" b="0" i="0">
+              <a:rPr sz="1200" b="0" i="0">
                 <a:solidFill>
                   <a:srgbClr val="333333"/>
                 </a:solidFill>
@@ -6508,32 +6406,32 @@
               <a:t>–   </a:t>
             </a:r>
             <a:r>
-              <a:rPr sz="1100" b="1" i="0">
-                <a:solidFill>
-                  <a:srgbClr val="333333"/>
-                </a:solidFill>
-                <a:latin typeface="Calibri"/>
-              </a:rPr>
-              <a:t>Sesión 11 –</a:t>
-            </a:r>
-            <a:r>
-              <a:rPr sz="1100" b="0" i="0">
-                <a:solidFill>
-                  <a:srgbClr val="333333"/>
-                </a:solidFill>
-                <a:latin typeface="Calibri"/>
-              </a:rPr>
-              <a:t> Taller de prototipado inicial con IA (19/11) · cierra Corte 2 (30%)</a:t>
+              <a:rPr sz="1200" b="1" i="0">
+                <a:solidFill>
+                  <a:srgbClr val="333333"/>
+                </a:solidFill>
+                <a:latin typeface="Calibri"/>
+              </a:rPr>
+              <a:t>Sesión 8 –</a:t>
+            </a:r>
+            <a:r>
+              <a:rPr sz="1200" b="0" i="0">
+                <a:solidFill>
+                  <a:srgbClr val="333333"/>
+                </a:solidFill>
+                <a:latin typeface="Calibri"/>
+              </a:rPr>
+              <a:t> Presentación de avances de proyectos (29/10)</a:t>
             </a:r>
           </a:p>
           <a:p>
             <a:pPr>
               <a:spcAft>
-                <a:spcPts val="600"/>
+                <a:spcPts val="900"/>
               </a:spcAft>
             </a:pPr>
             <a:r>
-              <a:rPr sz="1100" b="0" i="0">
+              <a:rPr sz="1200" b="0" i="0">
                 <a:solidFill>
                   <a:srgbClr val="333333"/>
                 </a:solidFill>
@@ -6542,32 +6440,32 @@
               <a:t>–   </a:t>
             </a:r>
             <a:r>
-              <a:rPr sz="1100" b="1" i="0">
-                <a:solidFill>
-                  <a:srgbClr val="333333"/>
-                </a:solidFill>
-                <a:latin typeface="Calibri"/>
-              </a:rPr>
-              <a:t>Sesión 12 –</a:t>
-            </a:r>
-            <a:r>
-              <a:rPr sz="1100" b="0" i="0">
-                <a:solidFill>
-                  <a:srgbClr val="333333"/>
-                </a:solidFill>
-                <a:latin typeface="Calibri"/>
-              </a:rPr>
-              <a:t> Presentación de avances de proyectos (26/11)</a:t>
+              <a:rPr sz="1200" b="1" i="0">
+                <a:solidFill>
+                  <a:srgbClr val="333333"/>
+                </a:solidFill>
+                <a:latin typeface="Calibri"/>
+              </a:rPr>
+              <a:t>Sesión 9 –</a:t>
+            </a:r>
+            <a:r>
+              <a:rPr sz="1200" b="0" i="0">
+                <a:solidFill>
+                  <a:srgbClr val="333333"/>
+                </a:solidFill>
+                <a:latin typeface="Calibri"/>
+              </a:rPr>
+              <a:t> Evaluación de impacto social y ambiental (05/11)</a:t>
             </a:r>
           </a:p>
           <a:p>
             <a:pPr>
               <a:spcAft>
-                <a:spcPts val="600"/>
+                <a:spcPts val="900"/>
               </a:spcAft>
             </a:pPr>
             <a:r>
-              <a:rPr sz="1100" b="0" i="0">
+              <a:rPr sz="1200" b="0" i="0">
                 <a:solidFill>
                   <a:srgbClr val="333333"/>
                 </a:solidFill>
@@ -6576,32 +6474,32 @@
               <a:t>–   </a:t>
             </a:r>
             <a:r>
-              <a:rPr sz="1100" b="1" i="0">
-                <a:solidFill>
-                  <a:srgbClr val="333333"/>
-                </a:solidFill>
-                <a:latin typeface="Calibri"/>
-              </a:rPr>
-              <a:t>Sesión 13 –</a:t>
-            </a:r>
-            <a:r>
-              <a:rPr sz="1100" b="0" i="0">
-                <a:solidFill>
-                  <a:srgbClr val="333333"/>
-                </a:solidFill>
-                <a:latin typeface="Calibri"/>
-              </a:rPr>
-              <a:t> Evaluación de impacto social y ambiental (03/12)</a:t>
+              <a:rPr sz="1200" b="1" i="0">
+                <a:solidFill>
+                  <a:srgbClr val="333333"/>
+                </a:solidFill>
+                <a:latin typeface="Calibri"/>
+              </a:rPr>
+              <a:t>Sesión 10 –</a:t>
+            </a:r>
+            <a:r>
+              <a:rPr sz="1200" b="0" i="0">
+                <a:solidFill>
+                  <a:srgbClr val="333333"/>
+                </a:solidFill>
+                <a:latin typeface="Calibri"/>
+              </a:rPr>
+              <a:t> Preparación de la presentación final (12/11)</a:t>
             </a:r>
           </a:p>
           <a:p>
             <a:pPr>
               <a:spcAft>
-                <a:spcPts val="600"/>
+                <a:spcPts val="900"/>
               </a:spcAft>
             </a:pPr>
             <a:r>
-              <a:rPr sz="1100" b="0" i="0">
+              <a:rPr sz="1200" b="0" i="0">
                 <a:solidFill>
                   <a:srgbClr val="333333"/>
                 </a:solidFill>
@@ -6610,90 +6508,22 @@
               <a:t>–   </a:t>
             </a:r>
             <a:r>
-              <a:rPr sz="1100" b="1" i="0">
-                <a:solidFill>
-                  <a:srgbClr val="333333"/>
-                </a:solidFill>
-                <a:latin typeface="Calibri"/>
-              </a:rPr>
-              <a:t>Sesión 14 –</a:t>
-            </a:r>
-            <a:r>
-              <a:rPr sz="1100" b="0" i="0">
-                <a:solidFill>
-                  <a:srgbClr val="333333"/>
-                </a:solidFill>
-                <a:latin typeface="Calibri"/>
-              </a:rPr>
-              <a:t> Preparación de la presentación final (10/12)</a:t>
-            </a:r>
-          </a:p>
-          <a:p>
-            <a:pPr>
-              <a:spcAft>
-                <a:spcPts val="600"/>
-              </a:spcAft>
-            </a:pPr>
-            <a:r>
-              <a:rPr sz="1100" b="0" i="0">
-                <a:solidFill>
-                  <a:srgbClr val="333333"/>
-                </a:solidFill>
-                <a:latin typeface="Calibri"/>
-              </a:rPr>
-              <a:t>–   </a:t>
-            </a:r>
-            <a:r>
-              <a:rPr sz="1100" b="1" i="0">
-                <a:solidFill>
-                  <a:srgbClr val="333333"/>
-                </a:solidFill>
-                <a:latin typeface="Calibri"/>
-              </a:rPr>
-              <a:t>Sesión 15 –</a:t>
-            </a:r>
-            <a:r>
-              <a:rPr sz="1100" b="0" i="0">
-                <a:solidFill>
-                  <a:srgbClr val="333333"/>
-                </a:solidFill>
-                <a:latin typeface="Calibri"/>
-              </a:rPr>
-              <a:t> Exposición final de proyectos (17/12)</a:t>
-            </a:r>
-          </a:p>
-          <a:p>
-            <a:pPr>
-              <a:spcAft>
-                <a:spcPts val="600"/>
-              </a:spcAft>
-            </a:pPr>
-            <a:r>
-              <a:rPr sz="1100" b="0" i="0">
-                <a:solidFill>
-                  <a:srgbClr val="333333"/>
-                </a:solidFill>
-                <a:latin typeface="Calibri"/>
-              </a:rPr>
-              <a:t>–   </a:t>
-            </a:r>
-            <a:r>
-              <a:rPr sz="1100" b="1" i="0">
-                <a:solidFill>
-                  <a:srgbClr val="333333"/>
-                </a:solidFill>
-                <a:latin typeface="Calibri"/>
-              </a:rPr>
-              <a:t>Sesión 16 –</a:t>
-            </a:r>
-            <a:r>
-              <a:rPr sz="1100" b="0" i="0">
-                <a:solidFill>
-                  <a:srgbClr val="333333"/>
-                </a:solidFill>
-                <a:latin typeface="Calibri"/>
-              </a:rPr>
-              <a:t> Socialización y evaluación final del curso (24/12) · cierra Corte 3 (40%)</a:t>
+              <a:rPr sz="1200" b="1" i="0">
+                <a:solidFill>
+                  <a:srgbClr val="333333"/>
+                </a:solidFill>
+                <a:latin typeface="Calibri"/>
+              </a:rPr>
+              <a:t>Sesión 11 –</a:t>
+            </a:r>
+            <a:r>
+              <a:rPr sz="1200" b="0" i="0">
+                <a:solidFill>
+                  <a:srgbClr val="333333"/>
+                </a:solidFill>
+                <a:latin typeface="Calibri"/>
+              </a:rPr>
+              <a:t> Exposición final de proyectos + Socialización y evaluación final del curso (19/11) · sesión doble · cierra Corte 3 (40%)</a:t>
             </a:r>
           </a:p>
         </p:txBody>
@@ -8711,7 +8541,7 @@
                 </a:solidFill>
                 <a:latin typeface="Calibri"/>
               </a:rPr>
-              <a:t> que se construye desde la sesión 6 y se expone en la 15.</a:t>
+              <a:t> que se construye desde el análisis de problemas y se expone en la última sesión.</a:t>
             </a:r>
           </a:p>
         </p:txBody>
@@ -8926,7 +8756,7 @@
                 </a:solidFill>
                 <a:latin typeface="Calibri"/>
               </a:rPr>
-              <a:t>Las 16 sesiones tienen la misma estructura. La conocen desde hoy para que nadie llegue a los 45 min pensando que todavía hay tiempo.</a:t>
+              <a:t>Las 11 sesiones tienen la misma estructura. La conocen desde hoy para que nadie llegue a los 45 min pensando que todavía hay tiempo.</a:t>
             </a:r>
           </a:p>
         </p:txBody>
@@ -12125,7 +11955,7 @@
                 </a:solidFill>
                 <a:latin typeface="Calibri"/>
               </a:rPr>
-              <a:t>Línea de tiempo (sesión 2), ciclo de vida (sesiones 7 y 8), diagramas del proyecto</a:t>
+              <a:t>Línea de tiempo (Clase 2), ciclo de vida (Clases 7 y 8), diagramas del proyecto</a:t>
             </a:r>
           </a:p>
         </p:txBody>
@@ -12587,7 +12417,7 @@
                 </a:solidFill>
                 <a:latin typeface="Calibri"/>
               </a:rPr>
-              <a:t>Infografía (sesión 7) y póster del proyecto final (sesiones 14 y 15)</a:t>
+              <a:t>Infografía (Clase 7) y póster del proyecto final (Clases 14 y 15)</a:t>
             </a:r>
           </a:p>
         </p:txBody>
@@ -12791,7 +12621,7 @@
                 </a:solidFill>
                 <a:latin typeface="Calibri"/>
               </a:rPr>
-              <a:t>Entrega del taller de equipo de las 16 sesiones (5 preguntas, 100 puntos), el diagnóstico de la sesión 1 y las dos evaluaciones de corte escritas (sesiones 6 y 11)</a:t>
+              <a:t>Entrega del taller de equipo de las 16 Clases del curso (repartidas en 11 sesiones de calendario), el diagnóstico de la Clase 1 y las dos evaluaciones de corte escritas (sesiones 4 y 7 del calendario, Clases 6 y 11)</a:t>
             </a:r>
           </a:p>
         </p:txBody>

--- a/Introduccion a la Ingenieria/Clases/Presentacion del Curso - Introduccion a la Ingenieria - SB141B.pptx
+++ b/Introduccion a la Ingenieria/Clases/Presentacion del Curso - Introduccion a la Ingenieria - SB141B.pptx
@@ -3448,7 +3448,7 @@
                 </a:solidFill>
                 <a:latin typeface="Calibri"/>
               </a:rPr>
-              <a:t>Google Meet</a:t>
+              <a:t>Microsoft Teams</a:t>
             </a:r>
             <a:r>
               <a:rPr sz="1500" b="0" i="0">
@@ -6827,7 +6827,7 @@
                 </a:solidFill>
                 <a:latin typeface="Calibri"/>
               </a:rPr>
-              <a:t>UNIAJC · Ingeniería de Sistemas · Virtual sincrónica por Google Meet</a:t>
+              <a:t>UNIAJC · Ingeniería de Sistemas · Virtual sincrónica por Microsoft Teams</a:t>
             </a:r>
           </a:p>
         </p:txBody>
@@ -9171,7 +9171,7 @@
                 </a:solidFill>
                 <a:latin typeface="Calibri"/>
               </a:rPr>
-              <a:t> — Cinco salas de grupo en Meet, el docente rota por todas</a:t>
+              <a:t> — Cinco salas de grupo en Teams, el docente rota por todas</a:t>
             </a:r>
           </a:p>
         </p:txBody>
@@ -10058,7 +10058,7 @@
                           </a:solidFill>
                           <a:latin typeface="Calibri"/>
                         </a:rPr>
-                        <a:t>Los 5 equipos pasan a sus salas de grupo de Meet y trabajan en paralelo sobre la misma consigna, cada uno en su documento en la nube. El docente entra y sale de las cinco salas (unos 3 min en cada una). A los 15 min se avisa por el chat general y se cierran las salas.</a:t>
+                        <a:t>Los 5 equipos pasan a sus salas de grupo de Teams y trabajan en paralelo sobre la misma consigna, cada uno en su documento en la nube. El docente entra y sale de las cinco salas (unos 3 min en cada una). A los 15 min se avisa por el chat general y se cierran las salas.</a:t>
                       </a:r>
                     </a:p>
                   </a:txBody>
@@ -11294,7 +11294,7 @@
                 </a:solidFill>
                 <a:latin typeface="Calibri"/>
               </a:rPr>
-              <a:t>GM</a:t>
+              <a:t>MT</a:t>
             </a:r>
           </a:p>
         </p:txBody>
@@ -11327,7 +11327,7 @@
                 </a:solidFill>
                 <a:latin typeface="Calibri"/>
               </a:rPr>
-              <a:t>Google Meet</a:t>
+              <a:t>Microsoft Teams</a:t>
             </a:r>
           </a:p>
           <a:p>
